--- a/docs/pptx/Ch12_P6_Asymptotic_Analysis.pptx
+++ b/docs/pptx/Ch12_P6_Asymptotic_Analysis.pptx
@@ -506,7 +506,11 @@
           <a:p>
             <a:r>
               <a:rPr lang="en-US" dirty="0"/>
-              <a:t/>
+              <a:t>TITRE: Analyse Asymptotique
+Big O, Ω, Θ
+Critère: Critère P6 — Asymptotic analysis, Big O
+Objectif de cette présentation : couvrir les concepts clés pour le critère Critère P6 — Asymptotic analysis, Big O.
+Durée estimée : 1h30 à 2h avec exercices.</a:t>
             </a:r>
             <a:endParaRPr lang="en-US" dirty="0"/>
           </a:p>
@@ -594,7 +598,14 @@
           <a:p>
             <a:r>
               <a:rPr lang="en-US" dirty="0"/>
-              <a:t/>
+              <a:t>PROF: Basé sur BIG_O.pdf.
+Table au tableau avec n=10, 100, 1000, 1M :
+- O(1) = 1, 1, 1, 1
+- O(log n) = 3, 7, 10, 20
+- O(n) = 10, 100, 1000, 1M
+- O(n²) = 100, 10K, 1M, 10¹²
+Montrer que O(n²) EXPLOSE pour les grands n.
+Utiliser le calculateur sur le site (Monde 4 Ch12).</a:t>
             </a:r>
             <a:endParaRPr lang="en-US" dirty="0"/>
           </a:p>
@@ -682,7 +693,12 @@
           <a:p>
             <a:r>
               <a:rPr lang="en-US" dirty="0"/>
-              <a:t/>
+              <a:t>PROF: Exemples détaillés du BIG_O.pdf :
+int nombre1 = nombre1 + 3;
+T(n) = 1 (affectation) + 1 (accès mémoire) + 1 (addition) = 3 → O(1)
+for (int i=0; i&lt;n; i++) { sum += arr[i]; }
+T(n) = n × (1+1) = 2n → O(n)
+Faire calculer 5 exemples aux étudiants.</a:t>
             </a:r>
             <a:endParaRPr lang="en-US" dirty="0"/>
           </a:p>
@@ -770,7 +786,11 @@
           <a:p>
             <a:r>
               <a:rPr lang="en-US" dirty="0"/>
-              <a:t/>
+              <a:t>PROF: Analogie :
+- O = 'je ne dépasserai JAMAIS cette vitesse' (limite haute)
+- Ω = 'je ne serai JAMAIS plus lent que ça' (limite basse)
+- Θ = 'je suis TOUJOURS à cette vitesse'
+Exemple : 'Le trajet Paris-Lyon prend Θ(2h) en TGV, O(6h) en voiture, Ω(1h30) en avion'.</a:t>
             </a:r>
             <a:endParaRPr lang="en-US" dirty="0"/>
           </a:p>
@@ -858,7 +878,8 @@
           <a:p>
             <a:r>
               <a:rPr lang="en-US" dirty="0"/>
-              <a:t/>
+              <a:t>PROF: Devoir P6 : analyser 5 algorithmes et déterminer leur complexité Big O.
+Site : Monde 4 Ch12 → Code→Complexité + Calculateur de croissance.</a:t>
             </a:r>
             <a:endParaRPr lang="en-US" dirty="0"/>
           </a:p>
@@ -1213,7 +1234,7 @@
     <p:bg>
       <p:bgPr>
         <a:solidFill>
-          <a:srgbClr val="1B2A4A"/>
+          <a:srgbClr val="1A1500"/>
         </a:solidFill>
       </p:bgPr>
     </p:bg>
@@ -1240,13 +1261,13 @@
         <p:spPr>
           <a:xfrm>
             <a:off x="0" y="0"/>
-            <a:ext cx="9144000" cy="1097280"/>
+            <a:ext cx="9144000" cy="73152"/>
           </a:xfrm>
           <a:prstGeom prst="rect">
             <a:avLst/>
           </a:prstGeom>
           <a:solidFill>
-            <a:srgbClr val="065A82"/>
+            <a:srgbClr val="D97706"/>
           </a:solidFill>
           <a:ln/>
         </p:spPr>
@@ -1259,7 +1280,7 @@
         </p:nvSpPr>
         <p:spPr>
           <a:xfrm>
-            <a:off x="731520" y="137160"/>
+            <a:off x="548640" y="365760"/>
             <a:ext cx="2743200" cy="365760"/>
           </a:xfrm>
           <a:prstGeom prst="rect">
@@ -1276,9 +1297,9 @@
               <a:buNone/>
             </a:pPr>
             <a:r>
-              <a:rPr lang="en-US" sz="1400" b="1" dirty="0">
-                <a:solidFill>
-                  <a:srgbClr val="00A896"/>
+              <a:rPr lang="en-US" sz="1200" b="1" spc="400" kern="0" dirty="0">
+                <a:solidFill>
+                  <a:srgbClr val="D97706"/>
                 </a:solidFill>
                 <a:latin typeface="Calibri" pitchFamily="34" charset="0"/>
                 <a:ea typeface="Calibri" pitchFamily="34" charset="-122"/>
@@ -1286,7 +1307,7 @@
               </a:rPr>
               <a:t>MONDE 4</a:t>
             </a:r>
-            <a:endParaRPr lang="en-US" sz="1400" dirty="0"/>
+            <a:endParaRPr lang="en-US" sz="1200" dirty="0"/>
           </a:p>
         </p:txBody>
       </p:sp>
@@ -1298,8 +1319,8 @@
         </p:nvSpPr>
         <p:spPr>
           <a:xfrm>
-            <a:off x="731520" y="457200"/>
-            <a:ext cx="7315200" cy="457200"/>
+            <a:off x="548640" y="731520"/>
+            <a:ext cx="7315200" cy="365760"/>
           </a:xfrm>
           <a:prstGeom prst="rect">
             <a:avLst/>
@@ -1315,9 +1336,9 @@
               <a:buNone/>
             </a:pPr>
             <a:r>
-              <a:rPr lang="en-US" sz="1200" dirty="0">
-                <a:solidFill>
-                  <a:srgbClr val="E2E8F0"/>
+              <a:rPr lang="en-US" sz="1100" dirty="0">
+                <a:solidFill>
+                  <a:srgbClr val="94A3B8"/>
                 </a:solidFill>
                 <a:latin typeface="Calibri" pitchFamily="34" charset="0"/>
                 <a:ea typeface="Calibri" pitchFamily="34" charset="-122"/>
@@ -1325,7 +1346,7 @@
               </a:rPr>
               <a:t>UNIT 19 : Data Structures &amp; Algorithms</a:t>
             </a:r>
-            <a:endParaRPr lang="en-US" sz="1200" dirty="0"/>
+            <a:endParaRPr lang="en-US" sz="1100" dirty="0"/>
           </a:p>
         </p:txBody>
       </p:sp>
@@ -1337,8 +1358,8 @@
         </p:nvSpPr>
         <p:spPr>
           <a:xfrm>
-            <a:off x="731520" y="1645920"/>
-            <a:ext cx="7315200" cy="640080"/>
+            <a:off x="548640" y="1371600"/>
+            <a:ext cx="8229600" cy="457200"/>
           </a:xfrm>
           <a:prstGeom prst="rect">
             <a:avLst/>
@@ -1354,17 +1375,17 @@
               <a:buNone/>
             </a:pPr>
             <a:r>
-              <a:rPr lang="en-US" sz="4400" b="1" dirty="0">
-                <a:solidFill>
-                  <a:srgbClr val="FFFFFF"/>
-                </a:solidFill>
-                <a:latin typeface="Trebuchet MS" pitchFamily="34" charset="0"/>
-                <a:ea typeface="Trebuchet MS" pitchFamily="34" charset="-122"/>
-                <a:cs typeface="Trebuchet MS" pitchFamily="34" charset="-120"/>
+              <a:rPr lang="en-US" sz="1400" b="1" dirty="0">
+                <a:solidFill>
+                  <a:srgbClr val="D97706"/>
+                </a:solidFill>
+                <a:latin typeface="Calibri" pitchFamily="34" charset="0"/>
+                <a:ea typeface="Calibri" pitchFamily="34" charset="-122"/>
+                <a:cs typeface="Calibri" pitchFamily="34" charset="-120"/>
               </a:rPr>
               <a:t>Chapitre 12</a:t>
             </a:r>
-            <a:endParaRPr lang="en-US" sz="4400" dirty="0"/>
+            <a:endParaRPr lang="en-US" sz="1400" dirty="0"/>
           </a:p>
         </p:txBody>
       </p:sp>
@@ -1376,8 +1397,8 @@
         </p:nvSpPr>
         <p:spPr>
           <a:xfrm>
-            <a:off x="731520" y="2286000"/>
-            <a:ext cx="7315200" cy="1097280"/>
+            <a:off x="548640" y="2011680"/>
+            <a:ext cx="8229600" cy="1371600"/>
           </a:xfrm>
           <a:prstGeom prst="rect">
             <a:avLst/>
@@ -1393,95 +1414,95 @@
               <a:buNone/>
             </a:pPr>
             <a:r>
-              <a:rPr lang="en-US" sz="3000" b="1" dirty="0">
-                <a:solidFill>
-                  <a:srgbClr val="00A896"/>
-                </a:solidFill>
-                <a:latin typeface="Trebuchet MS" pitchFamily="34" charset="0"/>
-                <a:ea typeface="Trebuchet MS" pitchFamily="34" charset="-122"/>
-                <a:cs typeface="Trebuchet MS" pitchFamily="34" charset="-120"/>
-              </a:rPr>
-              <a:t>Analyse asymptotique</a:t>
-            </a:r>
-            <a:endParaRPr lang="en-US" sz="3000" dirty="0"/>
+              <a:rPr lang="en-US" sz="3600" b="1" dirty="0">
+                <a:solidFill>
+                  <a:srgbClr val="FFFFFF"/>
+                </a:solidFill>
+                <a:latin typeface="Calibri" pitchFamily="34" charset="0"/>
+                <a:ea typeface="Calibri" pitchFamily="34" charset="-122"/>
+                <a:cs typeface="Calibri" pitchFamily="34" charset="-120"/>
+              </a:rPr>
+              <a:t>Analyse Asymptotique</a:t>
+            </a:r>
+            <a:endParaRPr lang="en-US" sz="3600" dirty="0"/>
           </a:p>
           <a:p>
             <a:pPr indent="0" marL="0">
               <a:buNone/>
             </a:pPr>
             <a:r>
-              <a:rPr lang="en-US" sz="3000" b="1" dirty="0">
-                <a:solidFill>
-                  <a:srgbClr val="00A896"/>
-                </a:solidFill>
-                <a:latin typeface="Trebuchet MS" pitchFamily="34" charset="0"/>
-                <a:ea typeface="Trebuchet MS" pitchFamily="34" charset="-122"/>
-                <a:cs typeface="Trebuchet MS" pitchFamily="34" charset="-120"/>
-              </a:rPr>
-              <a:t>Big O, Omega, Theta</a:t>
-            </a:r>
-            <a:endParaRPr lang="en-US" sz="3000" dirty="0"/>
-          </a:p>
-        </p:txBody>
-      </p:sp>
-      <p:sp>
-        <p:nvSpPr>
-          <p:cNvPr id="7" name="Shape 5"/>
+              <a:rPr lang="en-US" sz="3600" b="1" dirty="0">
+                <a:solidFill>
+                  <a:srgbClr val="FFFFFF"/>
+                </a:solidFill>
+                <a:latin typeface="Calibri" pitchFamily="34" charset="0"/>
+                <a:ea typeface="Calibri" pitchFamily="34" charset="-122"/>
+                <a:cs typeface="Calibri" pitchFamily="34" charset="-120"/>
+              </a:rPr>
+              <a:t>Big O, Ω, Θ</a:t>
+            </a:r>
+            <a:endParaRPr lang="en-US" sz="3600" dirty="0"/>
+          </a:p>
+        </p:txBody>
+      </p:sp>
+      <p:sp>
+        <p:nvSpPr>
+          <p:cNvPr id="7" name="Text 5"/>
           <p:cNvSpPr/>
           <p:nvPr/>
         </p:nvSpPr>
         <p:spPr>
           <a:xfrm>
-            <a:off x="731520" y="3657600"/>
-            <a:ext cx="2286000" cy="54864"/>
+            <a:off x="548640" y="3657600"/>
+            <a:ext cx="8229600" cy="365760"/>
           </a:xfrm>
           <a:prstGeom prst="rect">
             <a:avLst/>
           </a:prstGeom>
+          <a:noFill/>
+          <a:ln/>
+        </p:spPr>
+        <p:txBody>
+          <a:bodyPr wrap="square" rtlCol="0" anchor="ctr"/>
+          <a:lstStyle/>
+          <a:p>
+            <a:pPr indent="0" marL="0">
+              <a:buNone/>
+            </a:pPr>
+            <a:r>
+              <a:rPr lang="en-US" sz="1300" dirty="0">
+                <a:solidFill>
+                  <a:srgbClr val="94A3B8"/>
+                </a:solidFill>
+                <a:latin typeface="Calibri" pitchFamily="34" charset="0"/>
+                <a:ea typeface="Calibri" pitchFamily="34" charset="-122"/>
+                <a:cs typeface="Calibri" pitchFamily="34" charset="-120"/>
+              </a:rPr>
+              <a:t>Critère P6 — Asymptotic analysis, Big O</a:t>
+            </a:r>
+            <a:endParaRPr lang="en-US" sz="1300" dirty="0"/>
+          </a:p>
+        </p:txBody>
+      </p:sp>
+      <p:sp>
+        <p:nvSpPr>
+          <p:cNvPr id="8" name="Shape 6"/>
+          <p:cNvSpPr/>
+          <p:nvPr/>
+        </p:nvSpPr>
+        <p:spPr>
+          <a:xfrm>
+            <a:off x="0" y="5074920"/>
+            <a:ext cx="9144000" cy="73152"/>
+          </a:xfrm>
+          <a:prstGeom prst="rect">
+            <a:avLst/>
+          </a:prstGeom>
           <a:solidFill>
-            <a:srgbClr val="F97316"/>
+            <a:srgbClr val="D97706"/>
           </a:solidFill>
           <a:ln/>
         </p:spPr>
-      </p:sp>
-      <p:sp>
-        <p:nvSpPr>
-          <p:cNvPr id="8" name="Text 6"/>
-          <p:cNvSpPr/>
-          <p:nvPr/>
-        </p:nvSpPr>
-        <p:spPr>
-          <a:xfrm>
-            <a:off x="731520" y="3840480"/>
-            <a:ext cx="7315200" cy="731520"/>
-          </a:xfrm>
-          <a:prstGeom prst="rect">
-            <a:avLst/>
-          </a:prstGeom>
-          <a:noFill/>
-          <a:ln/>
-        </p:spPr>
-        <p:txBody>
-          <a:bodyPr wrap="square" rtlCol="0" anchor="ctr"/>
-          <a:lstStyle/>
-          <a:p>
-            <a:pPr indent="0" marL="0">
-              <a:buNone/>
-            </a:pPr>
-            <a:r>
-              <a:rPr lang="en-US" sz="1300" i="1" dirty="0">
-                <a:solidFill>
-                  <a:srgbClr val="E2E8F0"/>
-                </a:solidFill>
-                <a:latin typeface="Calibri" pitchFamily="34" charset="0"/>
-                <a:ea typeface="Calibri" pitchFamily="34" charset="-122"/>
-                <a:cs typeface="Calibri" pitchFamily="34" charset="-120"/>
-              </a:rPr>
-              <a:t>P6</a:t>
-            </a:r>
-            <a:endParaRPr lang="en-US" sz="1300" dirty="0"/>
-          </a:p>
-        </p:txBody>
       </p:sp>
     </p:spTree>
   </p:cSld>
@@ -1497,7 +1518,7 @@
     <p:bg>
       <p:bgPr>
         <a:solidFill>
-          <a:srgbClr val="F8FAFC"/>
+          <a:srgbClr val="1A1500"/>
         </a:solidFill>
       </p:bgPr>
     </p:bg>
@@ -1524,13 +1545,13 @@
         <p:spPr>
           <a:xfrm>
             <a:off x="0" y="0"/>
-            <a:ext cx="109728" cy="5143500"/>
+            <a:ext cx="9144000" cy="54864"/>
           </a:xfrm>
           <a:prstGeom prst="rect">
             <a:avLst/>
           </a:prstGeom>
           <a:solidFill>
-            <a:srgbClr val="F97316"/>
+            <a:srgbClr val="D97706"/>
           </a:solidFill>
           <a:ln/>
         </p:spPr>
@@ -1543,7 +1564,7 @@
         </p:nvSpPr>
         <p:spPr>
           <a:xfrm>
-            <a:off x="457200" y="274320"/>
+            <a:off x="548640" y="274320"/>
             <a:ext cx="8229600" cy="548640"/>
           </a:xfrm>
           <a:prstGeom prst="rect">
@@ -1560,17 +1581,17 @@
               <a:buNone/>
             </a:pPr>
             <a:r>
-              <a:rPr lang="en-US" sz="2600" b="1" dirty="0">
-                <a:solidFill>
-                  <a:srgbClr val="1B2A4A"/>
-                </a:solidFill>
-                <a:latin typeface="Trebuchet MS" pitchFamily="34" charset="0"/>
-                <a:ea typeface="Trebuchet MS" pitchFamily="34" charset="-122"/>
-                <a:cs typeface="Trebuchet MS" pitchFamily="34" charset="-120"/>
-              </a:rPr>
-              <a:t>Les 3 notations asymptotiques</a:t>
-            </a:r>
-            <a:endParaRPr lang="en-US" sz="2600" dirty="0"/>
+              <a:rPr lang="en-US" sz="2400" b="1" dirty="0">
+                <a:solidFill>
+                  <a:srgbClr val="FFFFFF"/>
+                </a:solidFill>
+                <a:latin typeface="Calibri" pitchFamily="34" charset="0"/>
+                <a:ea typeface="Calibri" pitchFamily="34" charset="-122"/>
+                <a:cs typeface="Calibri" pitchFamily="34" charset="-120"/>
+              </a:rPr>
+              <a:t>Notation Big O — Définitions</a:t>
+            </a:r>
+            <a:endParaRPr lang="en-US" sz="2400" dirty="0"/>
           </a:p>
         </p:txBody>
       </p:sp>
@@ -1582,8 +1603,8 @@
         </p:nvSpPr>
         <p:spPr>
           <a:xfrm>
-            <a:off x="640080" y="1005840"/>
-            <a:ext cx="7772400" cy="457200"/>
+            <a:off x="548640" y="1005840"/>
+            <a:ext cx="8046720" cy="3657600"/>
           </a:xfrm>
           <a:prstGeom prst="rect">
             <a:avLst/>
@@ -1592,223 +1613,131 @@
           <a:ln/>
         </p:spPr>
         <p:txBody>
-          <a:bodyPr wrap="square" rtlCol="0" anchor="ctr"/>
+          <a:bodyPr wrap="square" rtlCol="0" anchor="t"/>
           <a:lstStyle/>
           <a:p>
             <a:pPr marL="342900" indent="-342900">
+              <a:lnSpc>
+                <a:spcPct val="130000"/>
+              </a:lnSpc>
               <a:buSzPct val="100000"/>
               <a:buChar char="•"/>
             </a:pPr>
             <a:r>
               <a:rPr lang="en-US" sz="1400" dirty="0">
                 <a:solidFill>
-                  <a:srgbClr val="334155"/>
-                </a:solidFill>
-                <a:latin typeface="Calibri" pitchFamily="34" charset="0"/>
-                <a:ea typeface="Calibri" pitchFamily="34" charset="-122"/>
-                <a:cs typeface="Calibri" pitchFamily="34" charset="-120"/>
-              </a:rPr>
-              <a:t>O (Big O) : borne SUPÉRIEURE — au PIRE, l'algorithme ne sera pas plus lent que ça</a:t>
+                  <a:srgbClr val="E2E8F0"/>
+                </a:solidFill>
+                <a:latin typeface="Calibri" pitchFamily="34" charset="0"/>
+                <a:ea typeface="Calibri" pitchFamily="34" charset="-122"/>
+                <a:cs typeface="Calibri" pitchFamily="34" charset="-120"/>
+              </a:rPr>
+              <a:t>O(1) : constant — indépendant de n (accès tableau)</a:t>
             </a:r>
             <a:endParaRPr lang="en-US" sz="1400" dirty="0"/>
           </a:p>
-        </p:txBody>
-      </p:sp>
-      <p:sp>
-        <p:nvSpPr>
-          <p:cNvPr id="5" name="Text 3"/>
-          <p:cNvSpPr/>
-          <p:nvPr/>
-        </p:nvSpPr>
-        <p:spPr>
-          <a:xfrm>
-            <a:off x="640080" y="1554480"/>
-            <a:ext cx="7772400" cy="457200"/>
-          </a:xfrm>
-          <a:prstGeom prst="rect">
-            <a:avLst/>
-          </a:prstGeom>
-          <a:noFill/>
-          <a:ln/>
-        </p:spPr>
-        <p:txBody>
-          <a:bodyPr wrap="square" rtlCol="0" anchor="ctr"/>
-          <a:lstStyle/>
           <a:p>
             <a:pPr marL="342900" indent="-342900">
+              <a:lnSpc>
+                <a:spcPct val="130000"/>
+              </a:lnSpc>
               <a:buSzPct val="100000"/>
               <a:buChar char="•"/>
             </a:pPr>
             <a:r>
               <a:rPr lang="en-US" sz="1400" dirty="0">
                 <a:solidFill>
-                  <a:srgbClr val="334155"/>
-                </a:solidFill>
-                <a:latin typeface="Calibri" pitchFamily="34" charset="0"/>
-                <a:ea typeface="Calibri" pitchFamily="34" charset="-122"/>
-                <a:cs typeface="Calibri" pitchFamily="34" charset="-120"/>
-              </a:rPr>
-              <a:t>Ω (Omega) : borne INFÉRIEURE — au MIEUX, l'algorithme ne sera pas plus rapide que ça</a:t>
+                  <a:srgbClr val="E2E8F0"/>
+                </a:solidFill>
+                <a:latin typeface="Calibri" pitchFamily="34" charset="0"/>
+                <a:ea typeface="Calibri" pitchFamily="34" charset="-122"/>
+                <a:cs typeface="Calibri" pitchFamily="34" charset="-120"/>
+              </a:rPr>
+              <a:t>O(log n) : logarithmique — recherche binaire</a:t>
             </a:r>
             <a:endParaRPr lang="en-US" sz="1400" dirty="0"/>
           </a:p>
-        </p:txBody>
-      </p:sp>
-      <p:sp>
-        <p:nvSpPr>
-          <p:cNvPr id="6" name="Text 4"/>
-          <p:cNvSpPr/>
-          <p:nvPr/>
-        </p:nvSpPr>
-        <p:spPr>
-          <a:xfrm>
-            <a:off x="640080" y="2103120"/>
-            <a:ext cx="7772400" cy="457200"/>
-          </a:xfrm>
-          <a:prstGeom prst="rect">
-            <a:avLst/>
-          </a:prstGeom>
-          <a:noFill/>
-          <a:ln/>
-        </p:spPr>
-        <p:txBody>
-          <a:bodyPr wrap="square" rtlCol="0" anchor="ctr"/>
-          <a:lstStyle/>
           <a:p>
             <a:pPr marL="342900" indent="-342900">
+              <a:lnSpc>
+                <a:spcPct val="130000"/>
+              </a:lnSpc>
               <a:buSzPct val="100000"/>
               <a:buChar char="•"/>
             </a:pPr>
             <a:r>
               <a:rPr lang="en-US" sz="1400" dirty="0">
                 <a:solidFill>
-                  <a:srgbClr val="334155"/>
-                </a:solidFill>
-                <a:latin typeface="Calibri" pitchFamily="34" charset="0"/>
-                <a:ea typeface="Calibri" pitchFamily="34" charset="-122"/>
-                <a:cs typeface="Calibri" pitchFamily="34" charset="-120"/>
-              </a:rPr>
-              <a:t>Θ (Theta) : borne SERRÉE — l'algorithme est EXACTEMENT dans cet ordre de grandeur</a:t>
+                  <a:srgbClr val="E2E8F0"/>
+                </a:solidFill>
+                <a:latin typeface="Calibri" pitchFamily="34" charset="0"/>
+                <a:ea typeface="Calibri" pitchFamily="34" charset="-122"/>
+                <a:cs typeface="Calibri" pitchFamily="34" charset="-120"/>
+              </a:rPr>
+              <a:t>O(n) : linéaire — boucle simple</a:t>
             </a:r>
             <a:endParaRPr lang="en-US" sz="1400" dirty="0"/>
           </a:p>
-        </p:txBody>
-      </p:sp>
-      <p:sp>
-        <p:nvSpPr>
-          <p:cNvPr id="7" name="Text 5"/>
-          <p:cNvSpPr/>
-          <p:nvPr/>
-        </p:nvSpPr>
-        <p:spPr>
-          <a:xfrm>
-            <a:off x="640080" y="2651760"/>
-            <a:ext cx="7772400" cy="457200"/>
-          </a:xfrm>
-          <a:prstGeom prst="rect">
-            <a:avLst/>
-          </a:prstGeom>
-          <a:noFill/>
-          <a:ln/>
-        </p:spPr>
-        <p:txBody>
-          <a:bodyPr wrap="square" rtlCol="0" anchor="ctr"/>
-          <a:lstStyle/>
           <a:p>
             <a:pPr marL="342900" indent="-342900">
+              <a:lnSpc>
+                <a:spcPct val="130000"/>
+              </a:lnSpc>
               <a:buSzPct val="100000"/>
               <a:buChar char="•"/>
             </a:pPr>
             <a:r>
               <a:rPr lang="en-US" sz="1400" dirty="0">
                 <a:solidFill>
-                  <a:srgbClr val="334155"/>
-                </a:solidFill>
-                <a:latin typeface="Calibri" pitchFamily="34" charset="0"/>
-                <a:ea typeface="Calibri" pitchFamily="34" charset="-122"/>
-                <a:cs typeface="Calibri" pitchFamily="34" charset="-120"/>
-              </a:rPr>
-              <a:t>Exemple Bubble Sort : O(n²) pire cas, Ω(n) meilleur cas (déjà trié), pas de Θ unique</a:t>
+                  <a:srgbClr val="E2E8F0"/>
+                </a:solidFill>
+                <a:latin typeface="Calibri" pitchFamily="34" charset="0"/>
+                <a:ea typeface="Calibri" pitchFamily="34" charset="-122"/>
+                <a:cs typeface="Calibri" pitchFamily="34" charset="-120"/>
+              </a:rPr>
+              <a:t>O(n log n) : quasi-linéaire — tri optimal (Merge Sort)</a:t>
             </a:r>
             <a:endParaRPr lang="en-US" sz="1400" dirty="0"/>
           </a:p>
-        </p:txBody>
-      </p:sp>
-      <p:sp>
-        <p:nvSpPr>
-          <p:cNvPr id="8" name="Text 6"/>
-          <p:cNvSpPr/>
-          <p:nvPr/>
-        </p:nvSpPr>
-        <p:spPr>
-          <a:xfrm>
-            <a:off x="640080" y="3200400"/>
-            <a:ext cx="7772400" cy="457200"/>
-          </a:xfrm>
-          <a:prstGeom prst="rect">
-            <a:avLst/>
-          </a:prstGeom>
-          <a:noFill/>
-          <a:ln/>
-        </p:spPr>
-        <p:txBody>
-          <a:bodyPr wrap="square" rtlCol="0" anchor="ctr"/>
-          <a:lstStyle/>
           <a:p>
             <a:pPr marL="342900" indent="-342900">
+              <a:lnSpc>
+                <a:spcPct val="130000"/>
+              </a:lnSpc>
               <a:buSzPct val="100000"/>
               <a:buChar char="•"/>
             </a:pPr>
             <a:r>
               <a:rPr lang="en-US" sz="1400" dirty="0">
                 <a:solidFill>
-                  <a:srgbClr val="334155"/>
-                </a:solidFill>
-                <a:latin typeface="Calibri" pitchFamily="34" charset="0"/>
-                <a:ea typeface="Calibri" pitchFamily="34" charset="-122"/>
-                <a:cs typeface="Calibri" pitchFamily="34" charset="-120"/>
-              </a:rPr>
-              <a:t>Exemple Merge Sort : Θ(n log n) — toujours n log n, peu importe l'entrée</a:t>
+                  <a:srgbClr val="E2E8F0"/>
+                </a:solidFill>
+                <a:latin typeface="Calibri" pitchFamily="34" charset="0"/>
+                <a:ea typeface="Calibri" pitchFamily="34" charset="-122"/>
+                <a:cs typeface="Calibri" pitchFamily="34" charset="-120"/>
+              </a:rPr>
+              <a:t>O(n²) : quadratique — boucles imbriquées (Bubble Sort)</a:t>
             </a:r>
             <a:endParaRPr lang="en-US" sz="1400" dirty="0"/>
           </a:p>
-        </p:txBody>
-      </p:sp>
-      <p:sp>
-        <p:nvSpPr>
-          <p:cNvPr id="9" name="Text 7"/>
-          <p:cNvSpPr/>
-          <p:nvPr/>
-        </p:nvSpPr>
-        <p:spPr>
-          <a:xfrm>
-            <a:off x="640080" y="3749040"/>
-            <a:ext cx="7772400" cy="457200"/>
-          </a:xfrm>
-          <a:prstGeom prst="rect">
-            <a:avLst/>
-          </a:prstGeom>
-          <a:noFill/>
-          <a:ln/>
-        </p:spPr>
-        <p:txBody>
-          <a:bodyPr wrap="square" rtlCol="0" anchor="ctr"/>
-          <a:lstStyle/>
           <a:p>
             <a:pPr marL="342900" indent="-342900">
+              <a:lnSpc>
+                <a:spcPct val="130000"/>
+              </a:lnSpc>
               <a:buSzPct val="100000"/>
               <a:buChar char="•"/>
             </a:pPr>
             <a:r>
               <a:rPr lang="en-US" sz="1400" dirty="0">
                 <a:solidFill>
-                  <a:srgbClr val="334155"/>
-                </a:solidFill>
-                <a:latin typeface="Calibri" pitchFamily="34" charset="0"/>
-                <a:ea typeface="Calibri" pitchFamily="34" charset="-122"/>
-                <a:cs typeface="Calibri" pitchFamily="34" charset="-120"/>
-              </a:rPr>
-              <a:t>En pratique, on utilise surtout O (Big O) pour évaluer le pire cas</a:t>
+                  <a:srgbClr val="E2E8F0"/>
+                </a:solidFill>
+                <a:latin typeface="Calibri" pitchFamily="34" charset="0"/>
+                <a:ea typeface="Calibri" pitchFamily="34" charset="-122"/>
+                <a:cs typeface="Calibri" pitchFamily="34" charset="-120"/>
+              </a:rPr>
+              <a:t>O(2ⁿ) : exponentiel — à éviter !</a:t>
             </a:r>
             <a:endParaRPr lang="en-US" sz="1400" dirty="0"/>
           </a:p>
@@ -1828,7 +1757,7 @@
     <p:bg>
       <p:bgPr>
         <a:solidFill>
-          <a:srgbClr val="F8FAFC"/>
+          <a:srgbClr val="1A1500"/>
         </a:solidFill>
       </p:bgPr>
     </p:bg>
@@ -1855,13 +1784,13 @@
         <p:spPr>
           <a:xfrm>
             <a:off x="0" y="0"/>
-            <a:ext cx="109728" cy="5143500"/>
+            <a:ext cx="9144000" cy="54864"/>
           </a:xfrm>
           <a:prstGeom prst="rect">
             <a:avLst/>
           </a:prstGeom>
           <a:solidFill>
-            <a:srgbClr val="F97316"/>
+            <a:srgbClr val="D97706"/>
           </a:solidFill>
           <a:ln/>
         </p:spPr>
@@ -1874,7 +1803,7 @@
         </p:nvSpPr>
         <p:spPr>
           <a:xfrm>
-            <a:off x="457200" y="274320"/>
+            <a:off x="548640" y="274320"/>
             <a:ext cx="8229600" cy="548640"/>
           </a:xfrm>
           <a:prstGeom prst="rect">
@@ -1891,17 +1820,17 @@
               <a:buNone/>
             </a:pPr>
             <a:r>
-              <a:rPr lang="en-US" sz="2600" b="1" dirty="0">
-                <a:solidFill>
-                  <a:srgbClr val="1B2A4A"/>
-                </a:solidFill>
-                <a:latin typeface="Trebuchet MS" pitchFamily="34" charset="0"/>
-                <a:ea typeface="Trebuchet MS" pitchFamily="34" charset="-122"/>
-                <a:cs typeface="Trebuchet MS" pitchFamily="34" charset="-120"/>
-              </a:rPr>
-              <a:t>Les 6 complexités courantes (du plus rapide au plus lent)</a:t>
-            </a:r>
-            <a:endParaRPr lang="en-US" sz="2600" dirty="0"/>
+              <a:rPr lang="en-US" sz="2400" b="1" dirty="0">
+                <a:solidFill>
+                  <a:srgbClr val="FFFFFF"/>
+                </a:solidFill>
+                <a:latin typeface="Calibri" pitchFamily="34" charset="0"/>
+                <a:ea typeface="Calibri" pitchFamily="34" charset="-122"/>
+                <a:cs typeface="Calibri" pitchFamily="34" charset="-120"/>
+              </a:rPr>
+              <a:t>Règles de calcul Big O</a:t>
+            </a:r>
+            <a:endParaRPr lang="en-US" sz="2400" dirty="0"/>
           </a:p>
         </p:txBody>
       </p:sp>
@@ -1913,8 +1842,8 @@
         </p:nvSpPr>
         <p:spPr>
           <a:xfrm>
-            <a:off x="640080" y="1005840"/>
-            <a:ext cx="7772400" cy="457200"/>
+            <a:off x="548640" y="1005840"/>
+            <a:ext cx="3840480" cy="3200400"/>
           </a:xfrm>
           <a:prstGeom prst="rect">
             <a:avLst/>
@@ -1923,7 +1852,7 @@
           <a:ln/>
         </p:spPr>
         <p:txBody>
-          <a:bodyPr wrap="square" rtlCol="0" anchor="ctr"/>
+          <a:bodyPr wrap="square" rtlCol="0" anchor="t"/>
           <a:lstStyle/>
           <a:p>
             <a:pPr marL="342900" indent="-342900">
@@ -1931,59 +1860,131 @@
               <a:buChar char="•"/>
             </a:pPr>
             <a:r>
-              <a:rPr lang="en-US" sz="1400" dirty="0">
-                <a:solidFill>
-                  <a:srgbClr val="334155"/>
-                </a:solidFill>
-                <a:latin typeface="Calibri" pitchFamily="34" charset="0"/>
-                <a:ea typeface="Calibri" pitchFamily="34" charset="-122"/>
-                <a:cs typeface="Calibri" pitchFamily="34" charset="-120"/>
-              </a:rPr>
-              <a:t>O(1) — Constant : accès tableau par index, HashMap.get(). Indépendant de n.</a:t>
-            </a:r>
-            <a:endParaRPr lang="en-US" sz="1400" dirty="0"/>
-          </a:p>
-        </p:txBody>
-      </p:sp>
-      <p:sp>
-        <p:nvSpPr>
-          <p:cNvPr id="5" name="Text 3"/>
-          <p:cNvSpPr/>
-          <p:nvPr/>
-        </p:nvSpPr>
-        <p:spPr>
-          <a:xfrm>
-            <a:off x="640080" y="1554480"/>
-            <a:ext cx="7772400" cy="457200"/>
-          </a:xfrm>
-          <a:prstGeom prst="rect">
-            <a:avLst/>
-          </a:prstGeom>
-          <a:noFill/>
-          <a:ln/>
-        </p:spPr>
-        <p:txBody>
-          <a:bodyPr wrap="square" rtlCol="0" anchor="ctr"/>
-          <a:lstStyle/>
+              <a:rPr lang="en-US" sz="1300" dirty="0">
+                <a:solidFill>
+                  <a:srgbClr val="E2E8F0"/>
+                </a:solidFill>
+                <a:latin typeface="Calibri" pitchFamily="34" charset="0"/>
+                <a:ea typeface="Calibri" pitchFamily="34" charset="-122"/>
+                <a:cs typeface="Calibri" pitchFamily="34" charset="-120"/>
+              </a:rPr>
+              <a:t>Chaque instruction basique = 1 opération</a:t>
+            </a:r>
+            <a:endParaRPr lang="en-US" sz="1300" dirty="0"/>
+          </a:p>
           <a:p>
             <a:pPr marL="342900" indent="-342900">
               <a:buSzPct val="100000"/>
               <a:buChar char="•"/>
             </a:pPr>
             <a:r>
-              <a:rPr lang="en-US" sz="1400" dirty="0">
-                <a:solidFill>
-                  <a:srgbClr val="334155"/>
-                </a:solidFill>
-                <a:latin typeface="Calibri" pitchFamily="34" charset="0"/>
-                <a:ea typeface="Calibri" pitchFamily="34" charset="-122"/>
-                <a:cs typeface="Calibri" pitchFamily="34" charset="-120"/>
-              </a:rPr>
-              <a:t>O(log n) — Logarithmique : recherche binaire. Diviser par 2 à chaque étape.</a:t>
-            </a:r>
-            <a:endParaRPr lang="en-US" sz="1400" dirty="0"/>
-          </a:p>
-        </p:txBody>
+              <a:rPr lang="en-US" sz="1300" dirty="0">
+                <a:solidFill>
+                  <a:srgbClr val="E2E8F0"/>
+                </a:solidFill>
+                <a:latin typeface="Calibri" pitchFamily="34" charset="0"/>
+                <a:ea typeface="Calibri" pitchFamily="34" charset="-122"/>
+                <a:cs typeface="Calibri" pitchFamily="34" charset="-120"/>
+              </a:rPr>
+              <a:t>Boucle : multiplier par le nombre d'itérations</a:t>
+            </a:r>
+            <a:endParaRPr lang="en-US" sz="1300" dirty="0"/>
+          </a:p>
+          <a:p>
+            <a:pPr marL="342900" indent="-342900">
+              <a:buSzPct val="100000"/>
+              <a:buChar char="•"/>
+            </a:pPr>
+            <a:r>
+              <a:rPr lang="en-US" sz="1300" dirty="0">
+                <a:solidFill>
+                  <a:srgbClr val="E2E8F0"/>
+                </a:solidFill>
+                <a:latin typeface="Calibri" pitchFamily="34" charset="0"/>
+                <a:ea typeface="Calibri" pitchFamily="34" charset="-122"/>
+                <a:cs typeface="Calibri" pitchFamily="34" charset="-120"/>
+              </a:rPr>
+              <a:t>Appel de fonction : ajouter la complexité de la fonction</a:t>
+            </a:r>
+            <a:endParaRPr lang="en-US" sz="1300" dirty="0"/>
+          </a:p>
+          <a:p>
+            <a:pPr marL="342900" indent="-342900">
+              <a:buSzPct val="100000"/>
+              <a:buChar char="•"/>
+            </a:pPr>
+            <a:r>
+              <a:rPr lang="en-US" sz="1300" dirty="0">
+                <a:solidFill>
+                  <a:srgbClr val="E2E8F0"/>
+                </a:solidFill>
+                <a:latin typeface="Calibri" pitchFamily="34" charset="0"/>
+                <a:ea typeface="Calibri" pitchFamily="34" charset="-122"/>
+                <a:cs typeface="Calibri" pitchFamily="34" charset="-120"/>
+              </a:rPr>
+              <a:t>Garder le terme DOMINANT : O(n² + n) = O(n²)</a:t>
+            </a:r>
+            <a:endParaRPr lang="en-US" sz="1300" dirty="0"/>
+          </a:p>
+          <a:p>
+            <a:pPr marL="342900" indent="-342900">
+              <a:buSzPct val="100000"/>
+              <a:buChar char="•"/>
+            </a:pPr>
+            <a:r>
+              <a:rPr lang="en-US" sz="1300" dirty="0">
+                <a:solidFill>
+                  <a:srgbClr val="E2E8F0"/>
+                </a:solidFill>
+                <a:latin typeface="Calibri" pitchFamily="34" charset="0"/>
+                <a:ea typeface="Calibri" pitchFamily="34" charset="-122"/>
+                <a:cs typeface="Calibri" pitchFamily="34" charset="-120"/>
+              </a:rPr>
+              <a:t>Ignorer les constantes : O(3n) = O(n)</a:t>
+            </a:r>
+            <a:endParaRPr lang="en-US" sz="1300" dirty="0"/>
+          </a:p>
+          <a:p>
+            <a:pPr marL="342900" indent="-342900">
+              <a:buSzPct val="100000"/>
+              <a:buChar char="•"/>
+            </a:pPr>
+            <a:r>
+              <a:rPr lang="en-US" sz="1300" dirty="0">
+                <a:solidFill>
+                  <a:srgbClr val="E2E8F0"/>
+                </a:solidFill>
+                <a:latin typeface="Calibri" pitchFamily="34" charset="0"/>
+                <a:ea typeface="Calibri" pitchFamily="34" charset="-122"/>
+                <a:cs typeface="Calibri" pitchFamily="34" charset="-120"/>
+              </a:rPr>
+              <a:t>Cas récursif : résoudre la relation de récurrence</a:t>
+            </a:r>
+            <a:endParaRPr lang="en-US" sz="1300" dirty="0"/>
+          </a:p>
+        </p:txBody>
+      </p:sp>
+      <p:sp>
+        <p:nvSpPr>
+          <p:cNvPr id="5" name="Shape 3"/>
+          <p:cNvSpPr/>
+          <p:nvPr/>
+        </p:nvSpPr>
+        <p:spPr>
+          <a:xfrm>
+            <a:off x="4754880" y="1005840"/>
+            <a:ext cx="4023360" cy="3200400"/>
+          </a:xfrm>
+          <a:prstGeom prst="roundRect">
+            <a:avLst>
+              <a:gd name="adj" fmla="val 2857"/>
+            </a:avLst>
+          </a:prstGeom>
+          <a:solidFill>
+            <a:srgbClr val="0D1117"/>
+          </a:solidFill>
+          <a:ln/>
+        </p:spPr>
       </p:sp>
       <p:sp>
         <p:nvSpPr>
@@ -1993,8 +1994,8 @@
         </p:nvSpPr>
         <p:spPr>
           <a:xfrm>
-            <a:off x="640080" y="2103120"/>
-            <a:ext cx="7772400" cy="457200"/>
+            <a:off x="4937760" y="1143000"/>
+            <a:ext cx="3657600" cy="2926080"/>
           </a:xfrm>
           <a:prstGeom prst="rect">
             <a:avLst/>
@@ -2003,145 +2004,229 @@
           <a:ln/>
         </p:spPr>
         <p:txBody>
-          <a:bodyPr wrap="square" rtlCol="0" anchor="ctr"/>
-          <a:lstStyle/>
-          <a:p>
-            <a:pPr marL="342900" indent="-342900">
-              <a:buSzPct val="100000"/>
-              <a:buChar char="•"/>
-            </a:pPr>
-            <a:r>
-              <a:rPr lang="en-US" sz="1400" dirty="0">
-                <a:solidFill>
-                  <a:srgbClr val="334155"/>
-                </a:solidFill>
-                <a:latin typeface="Calibri" pitchFamily="34" charset="0"/>
-                <a:ea typeface="Calibri" pitchFamily="34" charset="-122"/>
-                <a:cs typeface="Calibri" pitchFamily="34" charset="-120"/>
-              </a:rPr>
-              <a:t>O(n) — Linéaire : parcourir une liste, recherche séquentielle. Proportionnel à n.</a:t>
-            </a:r>
-            <a:endParaRPr lang="en-US" sz="1400" dirty="0"/>
-          </a:p>
-        </p:txBody>
-      </p:sp>
-      <p:sp>
-        <p:nvSpPr>
-          <p:cNvPr id="7" name="Text 5"/>
-          <p:cNvSpPr/>
-          <p:nvPr/>
-        </p:nvSpPr>
-        <p:spPr>
-          <a:xfrm>
-            <a:off x="640080" y="2651760"/>
-            <a:ext cx="7772400" cy="457200"/>
-          </a:xfrm>
-          <a:prstGeom prst="rect">
-            <a:avLst/>
-          </a:prstGeom>
-          <a:noFill/>
-          <a:ln/>
-        </p:spPr>
-        <p:txBody>
-          <a:bodyPr wrap="square" rtlCol="0" anchor="ctr"/>
-          <a:lstStyle/>
-          <a:p>
-            <a:pPr marL="342900" indent="-342900">
-              <a:buSzPct val="100000"/>
-              <a:buChar char="•"/>
-            </a:pPr>
-            <a:r>
-              <a:rPr lang="en-US" sz="1400" dirty="0">
-                <a:solidFill>
-                  <a:srgbClr val="334155"/>
-                </a:solidFill>
-                <a:latin typeface="Calibri" pitchFamily="34" charset="0"/>
-                <a:ea typeface="Calibri" pitchFamily="34" charset="-122"/>
-                <a:cs typeface="Calibri" pitchFamily="34" charset="-120"/>
-              </a:rPr>
-              <a:t>O(n log n) — Linéarithmique : Merge Sort, Quick Sort. Le meilleur pour trier.</a:t>
-            </a:r>
-            <a:endParaRPr lang="en-US" sz="1400" dirty="0"/>
-          </a:p>
-        </p:txBody>
-      </p:sp>
-      <p:sp>
-        <p:nvSpPr>
-          <p:cNvPr id="8" name="Text 6"/>
-          <p:cNvSpPr/>
-          <p:nvPr/>
-        </p:nvSpPr>
-        <p:spPr>
-          <a:xfrm>
-            <a:off x="640080" y="3200400"/>
-            <a:ext cx="7772400" cy="457200"/>
-          </a:xfrm>
-          <a:prstGeom prst="rect">
-            <a:avLst/>
-          </a:prstGeom>
-          <a:noFill/>
-          <a:ln/>
-        </p:spPr>
-        <p:txBody>
-          <a:bodyPr wrap="square" rtlCol="0" anchor="ctr"/>
-          <a:lstStyle/>
-          <a:p>
-            <a:pPr marL="342900" indent="-342900">
-              <a:buSzPct val="100000"/>
-              <a:buChar char="•"/>
-            </a:pPr>
-            <a:r>
-              <a:rPr lang="en-US" sz="1400" dirty="0">
-                <a:solidFill>
-                  <a:srgbClr val="334155"/>
-                </a:solidFill>
-                <a:latin typeface="Calibri" pitchFamily="34" charset="0"/>
-                <a:ea typeface="Calibri" pitchFamily="34" charset="-122"/>
-                <a:cs typeface="Calibri" pitchFamily="34" charset="-120"/>
-              </a:rPr>
-              <a:t>O(n²) — Quadratique : Bubble Sort, deux boucles imbriquées. Lent pour grands n.</a:t>
-            </a:r>
-            <a:endParaRPr lang="en-US" sz="1400" dirty="0"/>
-          </a:p>
-        </p:txBody>
-      </p:sp>
-      <p:sp>
-        <p:nvSpPr>
-          <p:cNvPr id="9" name="Text 7"/>
-          <p:cNvSpPr/>
-          <p:nvPr/>
-        </p:nvSpPr>
-        <p:spPr>
-          <a:xfrm>
-            <a:off x="640080" y="3749040"/>
-            <a:ext cx="7772400" cy="457200"/>
-          </a:xfrm>
-          <a:prstGeom prst="rect">
-            <a:avLst/>
-          </a:prstGeom>
-          <a:noFill/>
-          <a:ln/>
-        </p:spPr>
-        <p:txBody>
-          <a:bodyPr wrap="square" rtlCol="0" anchor="ctr"/>
-          <a:lstStyle/>
-          <a:p>
-            <a:pPr marL="342900" indent="-342900">
-              <a:buSzPct val="100000"/>
-              <a:buChar char="•"/>
-            </a:pPr>
-            <a:r>
-              <a:rPr lang="en-US" sz="1400" dirty="0">
-                <a:solidFill>
-                  <a:srgbClr val="334155"/>
-                </a:solidFill>
-                <a:latin typeface="Calibri" pitchFamily="34" charset="0"/>
-                <a:ea typeface="Calibri" pitchFamily="34" charset="-122"/>
-                <a:cs typeface="Calibri" pitchFamily="34" charset="-120"/>
-              </a:rPr>
-              <a:t>O(2ⁿ) — Exponentiel : sous-ensembles, force brute. INUTILISABLE pour n &gt; 30.</a:t>
-            </a:r>
-            <a:endParaRPr lang="en-US" sz="1400" dirty="0"/>
+          <a:bodyPr wrap="square" rtlCol="0" anchor="t"/>
+          <a:lstStyle/>
+          <a:p>
+            <a:pPr indent="0" marL="0">
+              <a:buNone/>
+            </a:pPr>
+            <a:r>
+              <a:rPr lang="en-US" sz="1000" dirty="0">
+                <a:solidFill>
+                  <a:srgbClr val="A5F3FC"/>
+                </a:solidFill>
+                <a:latin typeface="Consolas" pitchFamily="34" charset="0"/>
+                <a:ea typeface="Consolas" pitchFamily="34" charset="-122"/>
+                <a:cs typeface="Consolas" pitchFamily="34" charset="-120"/>
+              </a:rPr>
+              <a:t>// O(1) — constant</a:t>
+            </a:r>
+            <a:endParaRPr lang="en-US" sz="1000" dirty="0"/>
+          </a:p>
+          <a:p>
+            <a:pPr indent="0" marL="0">
+              <a:buNone/>
+            </a:pPr>
+            <a:r>
+              <a:rPr lang="en-US" sz="1000" dirty="0">
+                <a:solidFill>
+                  <a:srgbClr val="A5F3FC"/>
+                </a:solidFill>
+                <a:latin typeface="Consolas" pitchFamily="34" charset="0"/>
+                <a:ea typeface="Consolas" pitchFamily="34" charset="-122"/>
+                <a:cs typeface="Consolas" pitchFamily="34" charset="-120"/>
+              </a:rPr>
+              <a:t>int x = arr[0] + 42;</a:t>
+            </a:r>
+            <a:endParaRPr lang="en-US" sz="1000" dirty="0"/>
+          </a:p>
+          <a:p>
+            <a:pPr indent="0" marL="0">
+              <a:buNone/>
+            </a:pPr>
+            <a:endParaRPr lang="en-US" sz="1000" dirty="0"/>
+          </a:p>
+          <a:p>
+            <a:pPr indent="0" marL="0">
+              <a:buNone/>
+            </a:pPr>
+            <a:r>
+              <a:rPr lang="en-US" sz="1000" dirty="0">
+                <a:solidFill>
+                  <a:srgbClr val="A5F3FC"/>
+                </a:solidFill>
+                <a:latin typeface="Consolas" pitchFamily="34" charset="0"/>
+                <a:ea typeface="Consolas" pitchFamily="34" charset="-122"/>
+                <a:cs typeface="Consolas" pitchFamily="34" charset="-120"/>
+              </a:rPr>
+              <a:t>// O(n) — linéaire</a:t>
+            </a:r>
+            <a:endParaRPr lang="en-US" sz="1000" dirty="0"/>
+          </a:p>
+          <a:p>
+            <a:pPr indent="0" marL="0">
+              <a:buNone/>
+            </a:pPr>
+            <a:r>
+              <a:rPr lang="en-US" sz="1000" dirty="0">
+                <a:solidFill>
+                  <a:srgbClr val="A5F3FC"/>
+                </a:solidFill>
+                <a:latin typeface="Consolas" pitchFamily="34" charset="0"/>
+                <a:ea typeface="Consolas" pitchFamily="34" charset="-122"/>
+                <a:cs typeface="Consolas" pitchFamily="34" charset="-120"/>
+              </a:rPr>
+              <a:t>for (int i=0; i&lt;n; i++)</a:t>
+            </a:r>
+            <a:endParaRPr lang="en-US" sz="1000" dirty="0"/>
+          </a:p>
+          <a:p>
+            <a:pPr indent="0" marL="0">
+              <a:buNone/>
+            </a:pPr>
+            <a:r>
+              <a:rPr lang="en-US" sz="1000" dirty="0">
+                <a:solidFill>
+                  <a:srgbClr val="A5F3FC"/>
+                </a:solidFill>
+                <a:latin typeface="Consolas" pitchFamily="34" charset="0"/>
+                <a:ea typeface="Consolas" pitchFamily="34" charset="-122"/>
+                <a:cs typeface="Consolas" pitchFamily="34" charset="-120"/>
+              </a:rPr>
+              <a:t>    sum += arr[i];</a:t>
+            </a:r>
+            <a:endParaRPr lang="en-US" sz="1000" dirty="0"/>
+          </a:p>
+          <a:p>
+            <a:pPr indent="0" marL="0">
+              <a:buNone/>
+            </a:pPr>
+            <a:endParaRPr lang="en-US" sz="1000" dirty="0"/>
+          </a:p>
+          <a:p>
+            <a:pPr indent="0" marL="0">
+              <a:buNone/>
+            </a:pPr>
+            <a:r>
+              <a:rPr lang="en-US" sz="1000" dirty="0">
+                <a:solidFill>
+                  <a:srgbClr val="A5F3FC"/>
+                </a:solidFill>
+                <a:latin typeface="Consolas" pitchFamily="34" charset="0"/>
+                <a:ea typeface="Consolas" pitchFamily="34" charset="-122"/>
+                <a:cs typeface="Consolas" pitchFamily="34" charset="-120"/>
+              </a:rPr>
+              <a:t>// O(n²) — quadratique</a:t>
+            </a:r>
+            <a:endParaRPr lang="en-US" sz="1000" dirty="0"/>
+          </a:p>
+          <a:p>
+            <a:pPr indent="0" marL="0">
+              <a:buNone/>
+            </a:pPr>
+            <a:r>
+              <a:rPr lang="en-US" sz="1000" dirty="0">
+                <a:solidFill>
+                  <a:srgbClr val="A5F3FC"/>
+                </a:solidFill>
+                <a:latin typeface="Consolas" pitchFamily="34" charset="0"/>
+                <a:ea typeface="Consolas" pitchFamily="34" charset="-122"/>
+                <a:cs typeface="Consolas" pitchFamily="34" charset="-120"/>
+              </a:rPr>
+              <a:t>for (int i=0; i&lt;n; i++)</a:t>
+            </a:r>
+            <a:endParaRPr lang="en-US" sz="1000" dirty="0"/>
+          </a:p>
+          <a:p>
+            <a:pPr indent="0" marL="0">
+              <a:buNone/>
+            </a:pPr>
+            <a:r>
+              <a:rPr lang="en-US" sz="1000" dirty="0">
+                <a:solidFill>
+                  <a:srgbClr val="A5F3FC"/>
+                </a:solidFill>
+                <a:latin typeface="Consolas" pitchFamily="34" charset="0"/>
+                <a:ea typeface="Consolas" pitchFamily="34" charset="-122"/>
+                <a:cs typeface="Consolas" pitchFamily="34" charset="-120"/>
+              </a:rPr>
+              <a:t>  for (int j=0; j&lt;n; j++)</a:t>
+            </a:r>
+            <a:endParaRPr lang="en-US" sz="1000" dirty="0"/>
+          </a:p>
+          <a:p>
+            <a:pPr indent="0" marL="0">
+              <a:buNone/>
+            </a:pPr>
+            <a:r>
+              <a:rPr lang="en-US" sz="1000" dirty="0">
+                <a:solidFill>
+                  <a:srgbClr val="A5F3FC"/>
+                </a:solidFill>
+                <a:latin typeface="Consolas" pitchFamily="34" charset="0"/>
+                <a:ea typeface="Consolas" pitchFamily="34" charset="-122"/>
+                <a:cs typeface="Consolas" pitchFamily="34" charset="-120"/>
+              </a:rPr>
+              <a:t>    matrix[i][j] = 0;</a:t>
+            </a:r>
+            <a:endParaRPr lang="en-US" sz="1000" dirty="0"/>
+          </a:p>
+          <a:p>
+            <a:pPr indent="0" marL="0">
+              <a:buNone/>
+            </a:pPr>
+            <a:endParaRPr lang="en-US" sz="1000" dirty="0"/>
+          </a:p>
+          <a:p>
+            <a:pPr indent="0" marL="0">
+              <a:buNone/>
+            </a:pPr>
+            <a:r>
+              <a:rPr lang="en-US" sz="1000" dirty="0">
+                <a:solidFill>
+                  <a:srgbClr val="A5F3FC"/>
+                </a:solidFill>
+                <a:latin typeface="Consolas" pitchFamily="34" charset="0"/>
+                <a:ea typeface="Consolas" pitchFamily="34" charset="-122"/>
+                <a:cs typeface="Consolas" pitchFamily="34" charset="-120"/>
+              </a:rPr>
+              <a:t>// O(log n) — logarithmique</a:t>
+            </a:r>
+            <a:endParaRPr lang="en-US" sz="1000" dirty="0"/>
+          </a:p>
+          <a:p>
+            <a:pPr indent="0" marL="0">
+              <a:buNone/>
+            </a:pPr>
+            <a:r>
+              <a:rPr lang="en-US" sz="1000" dirty="0">
+                <a:solidFill>
+                  <a:srgbClr val="A5F3FC"/>
+                </a:solidFill>
+                <a:latin typeface="Consolas" pitchFamily="34" charset="0"/>
+                <a:ea typeface="Consolas" pitchFamily="34" charset="-122"/>
+                <a:cs typeface="Consolas" pitchFamily="34" charset="-120"/>
+              </a:rPr>
+              <a:t>for (int i=1; i&lt;n; i*=2)</a:t>
+            </a:r>
+            <a:endParaRPr lang="en-US" sz="1000" dirty="0"/>
+          </a:p>
+          <a:p>
+            <a:pPr indent="0" marL="0">
+              <a:buNone/>
+            </a:pPr>
+            <a:r>
+              <a:rPr lang="en-US" sz="1000" dirty="0">
+                <a:solidFill>
+                  <a:srgbClr val="A5F3FC"/>
+                </a:solidFill>
+                <a:latin typeface="Consolas" pitchFamily="34" charset="0"/>
+                <a:ea typeface="Consolas" pitchFamily="34" charset="-122"/>
+                <a:cs typeface="Consolas" pitchFamily="34" charset="-120"/>
+              </a:rPr>
+              <a:t>    print(i);</a:t>
+            </a:r>
+            <a:endParaRPr lang="en-US" sz="1000" dirty="0"/>
           </a:p>
         </p:txBody>
       </p:sp>
@@ -2159,7 +2244,7 @@
     <p:bg>
       <p:bgPr>
         <a:solidFill>
-          <a:srgbClr val="F8FAFC"/>
+          <a:srgbClr val="1A1500"/>
         </a:solidFill>
       </p:bgPr>
     </p:bg>
@@ -2186,13 +2271,13 @@
         <p:spPr>
           <a:xfrm>
             <a:off x="0" y="0"/>
-            <a:ext cx="109728" cy="5143500"/>
+            <a:ext cx="9144000" cy="54864"/>
           </a:xfrm>
           <a:prstGeom prst="rect">
             <a:avLst/>
           </a:prstGeom>
           <a:solidFill>
-            <a:srgbClr val="F97316"/>
+            <a:srgbClr val="D97706"/>
           </a:solidFill>
           <a:ln/>
         </p:spPr>
@@ -2205,7 +2290,7 @@
         </p:nvSpPr>
         <p:spPr>
           <a:xfrm>
-            <a:off x="457200" y="274320"/>
+            <a:off x="548640" y="274320"/>
             <a:ext cx="8229600" cy="548640"/>
           </a:xfrm>
           <a:prstGeom prst="rect">
@@ -2222,17 +2307,17 @@
               <a:buNone/>
             </a:pPr>
             <a:r>
-              <a:rPr lang="en-US" sz="2600" b="1" dirty="0">
-                <a:solidFill>
-                  <a:srgbClr val="1B2A4A"/>
-                </a:solidFill>
-                <a:latin typeface="Trebuchet MS" pitchFamily="34" charset="0"/>
-                <a:ea typeface="Trebuchet MS" pitchFamily="34" charset="-122"/>
-                <a:cs typeface="Trebuchet MS" pitchFamily="34" charset="-120"/>
-              </a:rPr>
-              <a:t>Comment déterminer la complexité d'un code</a:t>
-            </a:r>
-            <a:endParaRPr lang="en-US" sz="2600" dirty="0"/>
+              <a:rPr lang="en-US" sz="2400" b="1" dirty="0">
+                <a:solidFill>
+                  <a:srgbClr val="FFFFFF"/>
+                </a:solidFill>
+                <a:latin typeface="Calibri" pitchFamily="34" charset="0"/>
+                <a:ea typeface="Calibri" pitchFamily="34" charset="-122"/>
+                <a:cs typeface="Calibri" pitchFamily="34" charset="-120"/>
+              </a:rPr>
+              <a:t>Big O vs Ω vs Θ</a:t>
+            </a:r>
+            <a:endParaRPr lang="en-US" sz="2400" dirty="0"/>
           </a:p>
         </p:txBody>
       </p:sp>
@@ -2244,8 +2329,8 @@
         </p:nvSpPr>
         <p:spPr>
           <a:xfrm>
-            <a:off x="640080" y="1005840"/>
-            <a:ext cx="7772400" cy="457200"/>
+            <a:off x="548640" y="1005840"/>
+            <a:ext cx="8046720" cy="3657600"/>
           </a:xfrm>
           <a:prstGeom prst="rect">
             <a:avLst/>
@@ -2254,223 +2339,131 @@
           <a:ln/>
         </p:spPr>
         <p:txBody>
-          <a:bodyPr wrap="square" rtlCol="0" anchor="ctr"/>
+          <a:bodyPr wrap="square" rtlCol="0" anchor="t"/>
           <a:lstStyle/>
           <a:p>
             <a:pPr marL="342900" indent="-342900">
+              <a:lnSpc>
+                <a:spcPct val="130000"/>
+              </a:lnSpc>
               <a:buSzPct val="100000"/>
               <a:buChar char="•"/>
             </a:pPr>
             <a:r>
               <a:rPr lang="en-US" sz="1400" dirty="0">
                 <a:solidFill>
-                  <a:srgbClr val="334155"/>
-                </a:solidFill>
-                <a:latin typeface="Calibri" pitchFamily="34" charset="0"/>
-                <a:ea typeface="Calibri" pitchFamily="34" charset="-122"/>
-                <a:cs typeface="Calibri" pitchFamily="34" charset="-120"/>
-              </a:rPr>
-              <a:t>RÈGLE 1 : Pas de boucle → O(1)</a:t>
+                  <a:srgbClr val="E2E8F0"/>
+                </a:solidFill>
+                <a:latin typeface="Calibri" pitchFamily="34" charset="0"/>
+                <a:ea typeface="Calibri" pitchFamily="34" charset="-122"/>
+                <a:cs typeface="Calibri" pitchFamily="34" charset="-120"/>
+              </a:rPr>
+              <a:t>O (Big O) : borne SUPÉRIEURE — au pire, pas plus lent que ça</a:t>
             </a:r>
             <a:endParaRPr lang="en-US" sz="1400" dirty="0"/>
           </a:p>
-        </p:txBody>
-      </p:sp>
-      <p:sp>
-        <p:nvSpPr>
-          <p:cNvPr id="5" name="Text 3"/>
-          <p:cNvSpPr/>
-          <p:nvPr/>
-        </p:nvSpPr>
-        <p:spPr>
-          <a:xfrm>
-            <a:off x="640080" y="1554480"/>
-            <a:ext cx="7772400" cy="457200"/>
-          </a:xfrm>
-          <a:prstGeom prst="rect">
-            <a:avLst/>
-          </a:prstGeom>
-          <a:noFill/>
-          <a:ln/>
-        </p:spPr>
-        <p:txBody>
-          <a:bodyPr wrap="square" rtlCol="0" anchor="ctr"/>
-          <a:lstStyle/>
           <a:p>
             <a:pPr marL="342900" indent="-342900">
+              <a:lnSpc>
+                <a:spcPct val="130000"/>
+              </a:lnSpc>
               <a:buSzPct val="100000"/>
               <a:buChar char="•"/>
             </a:pPr>
             <a:r>
               <a:rPr lang="en-US" sz="1400" dirty="0">
                 <a:solidFill>
-                  <a:srgbClr val="334155"/>
-                </a:solidFill>
-                <a:latin typeface="Calibri" pitchFamily="34" charset="0"/>
-                <a:ea typeface="Calibri" pitchFamily="34" charset="-122"/>
-                <a:cs typeface="Calibri" pitchFamily="34" charset="-120"/>
-              </a:rPr>
-              <a:t>RÈGLE 2 : Une boucle simple de 0 à n → O(n)</a:t>
+                  <a:srgbClr val="E2E8F0"/>
+                </a:solidFill>
+                <a:latin typeface="Calibri" pitchFamily="34" charset="0"/>
+                <a:ea typeface="Calibri" pitchFamily="34" charset="-122"/>
+                <a:cs typeface="Calibri" pitchFamily="34" charset="-120"/>
+              </a:rPr>
+              <a:t>Ω (Big Omega) : borne INFÉRIEURE — au mieux, pas plus rapide que ça</a:t>
             </a:r>
             <a:endParaRPr lang="en-US" sz="1400" dirty="0"/>
           </a:p>
-        </p:txBody>
-      </p:sp>
-      <p:sp>
-        <p:nvSpPr>
-          <p:cNvPr id="6" name="Text 4"/>
-          <p:cNvSpPr/>
-          <p:nvPr/>
-        </p:nvSpPr>
-        <p:spPr>
-          <a:xfrm>
-            <a:off x="640080" y="2103120"/>
-            <a:ext cx="7772400" cy="457200"/>
-          </a:xfrm>
-          <a:prstGeom prst="rect">
-            <a:avLst/>
-          </a:prstGeom>
-          <a:noFill/>
-          <a:ln/>
-        </p:spPr>
-        <p:txBody>
-          <a:bodyPr wrap="square" rtlCol="0" anchor="ctr"/>
-          <a:lstStyle/>
           <a:p>
             <a:pPr marL="342900" indent="-342900">
+              <a:lnSpc>
+                <a:spcPct val="130000"/>
+              </a:lnSpc>
               <a:buSzPct val="100000"/>
               <a:buChar char="•"/>
             </a:pPr>
             <a:r>
               <a:rPr lang="en-US" sz="1400" dirty="0">
                 <a:solidFill>
-                  <a:srgbClr val="334155"/>
-                </a:solidFill>
-                <a:latin typeface="Calibri" pitchFamily="34" charset="0"/>
-                <a:ea typeface="Calibri" pitchFamily="34" charset="-122"/>
-                <a:cs typeface="Calibri" pitchFamily="34" charset="-120"/>
-              </a:rPr>
-              <a:t>RÈGLE 3 : Deux boucles imbriquées → O(n²)</a:t>
+                  <a:srgbClr val="E2E8F0"/>
+                </a:solidFill>
+                <a:latin typeface="Calibri" pitchFamily="34" charset="0"/>
+                <a:ea typeface="Calibri" pitchFamily="34" charset="-122"/>
+                <a:cs typeface="Calibri" pitchFamily="34" charset="-120"/>
+              </a:rPr>
+              <a:t>Θ (Big Theta) : borne SERRÉE — toujours à ce rythme</a:t>
             </a:r>
             <a:endParaRPr lang="en-US" sz="1400" dirty="0"/>
           </a:p>
-        </p:txBody>
-      </p:sp>
-      <p:sp>
-        <p:nvSpPr>
-          <p:cNvPr id="7" name="Text 5"/>
-          <p:cNvSpPr/>
-          <p:nvPr/>
-        </p:nvSpPr>
-        <p:spPr>
-          <a:xfrm>
-            <a:off x="640080" y="2651760"/>
-            <a:ext cx="7772400" cy="457200"/>
-          </a:xfrm>
-          <a:prstGeom prst="rect">
-            <a:avLst/>
-          </a:prstGeom>
-          <a:noFill/>
-          <a:ln/>
-        </p:spPr>
-        <p:txBody>
-          <a:bodyPr wrap="square" rtlCol="0" anchor="ctr"/>
-          <a:lstStyle/>
           <a:p>
             <a:pPr marL="342900" indent="-342900">
+              <a:lnSpc>
+                <a:spcPct val="130000"/>
+              </a:lnSpc>
               <a:buSzPct val="100000"/>
               <a:buChar char="•"/>
             </a:pPr>
             <a:r>
               <a:rPr lang="en-US" sz="1400" dirty="0">
                 <a:solidFill>
-                  <a:srgbClr val="334155"/>
-                </a:solidFill>
-                <a:latin typeface="Calibri" pitchFamily="34" charset="0"/>
-                <a:ea typeface="Calibri" pitchFamily="34" charset="-122"/>
-                <a:cs typeface="Calibri" pitchFamily="34" charset="-120"/>
-              </a:rPr>
-              <a:t>RÈGLE 4 : Division par 2 à chaque itération (i *= 2) → O(log n)</a:t>
+                  <a:srgbClr val="E2E8F0"/>
+                </a:solidFill>
+                <a:latin typeface="Calibri" pitchFamily="34" charset="0"/>
+                <a:ea typeface="Calibri" pitchFamily="34" charset="-122"/>
+                <a:cs typeface="Calibri" pitchFamily="34" charset="-120"/>
+              </a:rPr>
+              <a:t>Quick Sort : O(n²) pire cas, Θ(n log n) cas moyen</a:t>
             </a:r>
             <a:endParaRPr lang="en-US" sz="1400" dirty="0"/>
           </a:p>
-        </p:txBody>
-      </p:sp>
-      <p:sp>
-        <p:nvSpPr>
-          <p:cNvPr id="8" name="Text 6"/>
-          <p:cNvSpPr/>
-          <p:nvPr/>
-        </p:nvSpPr>
-        <p:spPr>
-          <a:xfrm>
-            <a:off x="640080" y="3200400"/>
-            <a:ext cx="7772400" cy="457200"/>
-          </a:xfrm>
-          <a:prstGeom prst="rect">
-            <a:avLst/>
-          </a:prstGeom>
-          <a:noFill/>
-          <a:ln/>
-        </p:spPr>
-        <p:txBody>
-          <a:bodyPr wrap="square" rtlCol="0" anchor="ctr"/>
-          <a:lstStyle/>
           <a:p>
             <a:pPr marL="342900" indent="-342900">
+              <a:lnSpc>
+                <a:spcPct val="130000"/>
+              </a:lnSpc>
               <a:buSzPct val="100000"/>
               <a:buChar char="•"/>
             </a:pPr>
             <a:r>
               <a:rPr lang="en-US" sz="1400" dirty="0">
                 <a:solidFill>
-                  <a:srgbClr val="334155"/>
-                </a:solidFill>
-                <a:latin typeface="Calibri" pitchFamily="34" charset="0"/>
-                <a:ea typeface="Calibri" pitchFamily="34" charset="-122"/>
-                <a:cs typeface="Calibri" pitchFamily="34" charset="-120"/>
-              </a:rPr>
-              <a:t>RÈGLE 5 : Ignorer les constantes (O(2n) = O(n), O(n² + n) = O(n²))</a:t>
+                  <a:srgbClr val="E2E8F0"/>
+                </a:solidFill>
+                <a:latin typeface="Calibri" pitchFamily="34" charset="0"/>
+                <a:ea typeface="Calibri" pitchFamily="34" charset="-122"/>
+                <a:cs typeface="Calibri" pitchFamily="34" charset="-120"/>
+              </a:rPr>
+              <a:t>Merge Sort : Θ(n log n) toujours — borne serrée</a:t>
             </a:r>
             <a:endParaRPr lang="en-US" sz="1400" dirty="0"/>
           </a:p>
-        </p:txBody>
-      </p:sp>
-      <p:sp>
-        <p:nvSpPr>
-          <p:cNvPr id="9" name="Text 7"/>
-          <p:cNvSpPr/>
-          <p:nvPr/>
-        </p:nvSpPr>
-        <p:spPr>
-          <a:xfrm>
-            <a:off x="640080" y="3749040"/>
-            <a:ext cx="7772400" cy="457200"/>
-          </a:xfrm>
-          <a:prstGeom prst="rect">
-            <a:avLst/>
-          </a:prstGeom>
-          <a:noFill/>
-          <a:ln/>
-        </p:spPr>
-        <p:txBody>
-          <a:bodyPr wrap="square" rtlCol="0" anchor="ctr"/>
-          <a:lstStyle/>
           <a:p>
             <a:pPr marL="342900" indent="-342900">
+              <a:lnSpc>
+                <a:spcPct val="130000"/>
+              </a:lnSpc>
               <a:buSzPct val="100000"/>
               <a:buChar char="•"/>
             </a:pPr>
             <a:r>
               <a:rPr lang="en-US" sz="1400" dirty="0">
                 <a:solidFill>
-                  <a:srgbClr val="334155"/>
-                </a:solidFill>
-                <a:latin typeface="Calibri" pitchFamily="34" charset="0"/>
-                <a:ea typeface="Calibri" pitchFamily="34" charset="-122"/>
-                <a:cs typeface="Calibri" pitchFamily="34" charset="-120"/>
-              </a:rPr>
-              <a:t>RÈGLE 6 : Garder le terme dominant (O(n³ + n² + n) = O(n³))</a:t>
+                  <a:srgbClr val="E2E8F0"/>
+                </a:solidFill>
+                <a:latin typeface="Calibri" pitchFamily="34" charset="0"/>
+                <a:ea typeface="Calibri" pitchFamily="34" charset="-122"/>
+                <a:cs typeface="Calibri" pitchFamily="34" charset="-120"/>
+              </a:rPr>
+              <a:t>En pratique : on utilise surtout O (pire cas)</a:t>
             </a:r>
             <a:endParaRPr lang="en-US" sz="1400" dirty="0"/>
           </a:p>
@@ -2490,7 +2483,7 @@
     <p:bg>
       <p:bgPr>
         <a:solidFill>
-          <a:srgbClr val="0F172A"/>
+          <a:srgbClr val="1A1500"/>
         </a:solidFill>
       </p:bgPr>
     </p:bg>
@@ -2510,62 +2503,64 @@
       </p:grpSpPr>
       <p:sp>
         <p:nvSpPr>
-          <p:cNvPr id="2" name="Shape 0"/>
+          <p:cNvPr id="2" name="Text 0"/>
           <p:cNvSpPr/>
           <p:nvPr/>
         </p:nvSpPr>
         <p:spPr>
           <a:xfrm>
-            <a:off x="0" y="0"/>
-            <a:ext cx="9144000" cy="73152"/>
+            <a:off x="548640" y="274320"/>
+            <a:ext cx="8229600" cy="548640"/>
           </a:xfrm>
           <a:prstGeom prst="rect">
             <a:avLst/>
           </a:prstGeom>
+          <a:noFill/>
+          <a:ln/>
+        </p:spPr>
+        <p:txBody>
+          <a:bodyPr wrap="square" rtlCol="0" anchor="ctr"/>
+          <a:lstStyle/>
+          <a:p>
+            <a:pPr indent="0" marL="0">
+              <a:buNone/>
+            </a:pPr>
+            <a:r>
+              <a:rPr lang="en-US" sz="2800" b="1" dirty="0">
+                <a:solidFill>
+                  <a:srgbClr val="FFFFFF"/>
+                </a:solidFill>
+                <a:latin typeface="Calibri" pitchFamily="34" charset="0"/>
+                <a:ea typeface="Calibri" pitchFamily="34" charset="-122"/>
+                <a:cs typeface="Calibri" pitchFamily="34" charset="-120"/>
+              </a:rPr>
+              <a:t>Récapitulatif</a:t>
+            </a:r>
+            <a:endParaRPr lang="en-US" sz="2800" dirty="0"/>
+          </a:p>
+        </p:txBody>
+      </p:sp>
+      <p:sp>
+        <p:nvSpPr>
+          <p:cNvPr id="3" name="Shape 1"/>
+          <p:cNvSpPr/>
+          <p:nvPr/>
+        </p:nvSpPr>
+        <p:spPr>
+          <a:xfrm>
+            <a:off x="548640" y="1097280"/>
+            <a:ext cx="2621280" cy="3200400"/>
+          </a:xfrm>
+          <a:prstGeom prst="roundRect">
+            <a:avLst>
+              <a:gd name="adj" fmla="val 3488"/>
+            </a:avLst>
+          </a:prstGeom>
           <a:solidFill>
-            <a:srgbClr val="DC2626"/>
+            <a:srgbClr val="2D2400"/>
           </a:solidFill>
           <a:ln/>
         </p:spPr>
-      </p:sp>
-      <p:sp>
-        <p:nvSpPr>
-          <p:cNvPr id="3" name="Text 1"/>
-          <p:cNvSpPr/>
-          <p:nvPr/>
-        </p:nvSpPr>
-        <p:spPr>
-          <a:xfrm>
-            <a:off x="457200" y="182880"/>
-            <a:ext cx="7315200" cy="457200"/>
-          </a:xfrm>
-          <a:prstGeom prst="rect">
-            <a:avLst/>
-          </a:prstGeom>
-          <a:noFill/>
-          <a:ln/>
-        </p:spPr>
-        <p:txBody>
-          <a:bodyPr wrap="square" rtlCol="0" anchor="ctr"/>
-          <a:lstStyle/>
-          <a:p>
-            <a:pPr indent="0" marL="0">
-              <a:buNone/>
-            </a:pPr>
-            <a:r>
-              <a:rPr lang="en-US" sz="2200" b="1" dirty="0">
-                <a:solidFill>
-                  <a:srgbClr val="DC2626"/>
-                </a:solidFill>
-                <a:latin typeface="Trebuchet MS" pitchFamily="34" charset="0"/>
-                <a:ea typeface="Trebuchet MS" pitchFamily="34" charset="-122"/>
-                <a:cs typeface="Trebuchet MS" pitchFamily="34" charset="-120"/>
-              </a:rPr>
-              <a:t>NOTES ENSEIGNANT — Ch.12 P6 Analyse asymptotique</a:t>
-            </a:r>
-            <a:endParaRPr lang="en-US" sz="2200" dirty="0"/>
-          </a:p>
-        </p:txBody>
       </p:sp>
       <p:sp>
         <p:nvSpPr>
@@ -2575,8 +2570,8 @@
         </p:nvSpPr>
         <p:spPr>
           <a:xfrm>
-            <a:off x="457200" y="731520"/>
-            <a:ext cx="8229600" cy="4114800"/>
+            <a:off x="548640" y="1280160"/>
+            <a:ext cx="2621280" cy="457200"/>
           </a:xfrm>
           <a:prstGeom prst="rect">
             <a:avLst/>
@@ -2588,194 +2583,368 @@
           <a:bodyPr wrap="square" rtlCol="0" anchor="ctr"/>
           <a:lstStyle/>
           <a:p>
-            <a:pPr indent="0" marL="0">
-              <a:buNone/>
-            </a:pPr>
-            <a:r>
-              <a:rPr lang="en-US" sz="1500" b="1" dirty="0">
-                <a:solidFill>
-                  <a:srgbClr val="00A896"/>
-                </a:solidFill>
-                <a:latin typeface="Trebuchet MS" pitchFamily="34" charset="0"/>
-                <a:ea typeface="Trebuchet MS" pitchFamily="34" charset="-122"/>
-                <a:cs typeface="Trebuchet MS" pitchFamily="34" charset="-120"/>
-              </a:rPr>
-              <a:t>Plan de séance :</a:t>
-            </a:r>
-            <a:endParaRPr lang="en-US" sz="1500" dirty="0"/>
-          </a:p>
-          <a:p>
-            <a:pPr indent="0" marL="0">
-              <a:buNone/>
-            </a:pPr>
-            <a:endParaRPr lang="en-US" sz="1500" dirty="0"/>
-          </a:p>
-          <a:p>
-            <a:pPr marL="342900" indent="-342900">
-              <a:buSzPct val="100000"/>
-              <a:buChar char="•"/>
-            </a:pPr>
-            <a:r>
-              <a:rPr lang="en-US" sz="1200" dirty="0">
-                <a:solidFill>
-                  <a:srgbClr val="E2E8F0"/>
-                </a:solidFill>
-                <a:latin typeface="Calibri" pitchFamily="34" charset="0"/>
-                <a:ea typeface="Calibri" pitchFamily="34" charset="-122"/>
-                <a:cs typeface="Calibri" pitchFamily="34" charset="-120"/>
-              </a:rPr>
-              <a:t>P1 : O, Omega, Theta — définitions et exemples visuels (courbes)</a:t>
-            </a:r>
-            <a:endParaRPr lang="en-US" sz="1500" dirty="0"/>
-          </a:p>
-          <a:p>
-            <a:pPr marL="342900" indent="-342900">
-              <a:buSzPct val="100000"/>
-              <a:buChar char="•"/>
-            </a:pPr>
-            <a:r>
-              <a:rPr lang="en-US" sz="1200" dirty="0">
-                <a:solidFill>
-                  <a:srgbClr val="E2E8F0"/>
-                </a:solidFill>
-                <a:latin typeface="Calibri" pitchFamily="34" charset="0"/>
-                <a:ea typeface="Calibri" pitchFamily="34" charset="-122"/>
-                <a:cs typeface="Calibri" pitchFamily="34" charset="-120"/>
-              </a:rPr>
-              <a:t>P2 : Les 6 complexités avec exemples de code pour chacune</a:t>
-            </a:r>
-            <a:endParaRPr lang="en-US" sz="1500" dirty="0"/>
-          </a:p>
-          <a:p>
-            <a:pPr marL="342900" indent="-342900">
-              <a:buSzPct val="100000"/>
-              <a:buChar char="•"/>
-            </a:pPr>
-            <a:r>
-              <a:rPr lang="en-US" sz="1200" dirty="0">
-                <a:solidFill>
-                  <a:srgbClr val="E2E8F0"/>
-                </a:solidFill>
-                <a:latin typeface="Calibri" pitchFamily="34" charset="0"/>
-                <a:ea typeface="Calibri" pitchFamily="34" charset="-122"/>
-                <a:cs typeface="Calibri" pitchFamily="34" charset="-120"/>
-              </a:rPr>
-              <a:t>P3 : Mini-jeu (identifier la complexité) + exercices au tableau</a:t>
-            </a:r>
-            <a:endParaRPr lang="en-US" sz="1500" dirty="0"/>
-          </a:p>
-          <a:p>
-            <a:pPr marL="342900" indent="-342900">
-              <a:buSzPct val="100000"/>
-              <a:buChar char="•"/>
-            </a:pPr>
-            <a:r>
-              <a:rPr lang="en-US" sz="1200" dirty="0">
-                <a:solidFill>
-                  <a:srgbClr val="E2E8F0"/>
-                </a:solidFill>
-                <a:latin typeface="Calibri" pitchFamily="34" charset="0"/>
-                <a:ea typeface="Calibri" pitchFamily="34" charset="-122"/>
-                <a:cs typeface="Calibri" pitchFamily="34" charset="-120"/>
-              </a:rPr>
-              <a:t>P4 : Exercice : analyser 10 extraits de code et donner leur Big O</a:t>
-            </a:r>
-            <a:endParaRPr lang="en-US" sz="1500" dirty="0"/>
-          </a:p>
-          <a:p>
-            <a:pPr indent="0" marL="0">
-              <a:buNone/>
-            </a:pPr>
-            <a:endParaRPr lang="en-US" sz="1500" dirty="0"/>
-          </a:p>
-          <a:p>
-            <a:pPr indent="0" marL="0">
-              <a:buNone/>
-            </a:pPr>
-            <a:r>
-              <a:rPr lang="en-US" sz="1400" b="1" dirty="0">
-                <a:solidFill>
-                  <a:srgbClr val="F97316"/>
-                </a:solidFill>
-                <a:latin typeface="Calibri" pitchFamily="34" charset="0"/>
-                <a:ea typeface="Calibri" pitchFamily="34" charset="-122"/>
-                <a:cs typeface="Calibri" pitchFamily="34" charset="-120"/>
-              </a:rPr>
-              <a:t>Critère P6 — l'étudiant doit :</a:t>
-            </a:r>
-            <a:endParaRPr lang="en-US" sz="1500" dirty="0"/>
-          </a:p>
-          <a:p>
-            <a:pPr marL="342900" indent="-342900">
-              <a:buSzPct val="100000"/>
-              <a:buChar char="•"/>
-            </a:pPr>
-            <a:r>
-              <a:rPr lang="en-US" sz="1200" dirty="0">
-                <a:solidFill>
-                  <a:srgbClr val="E2E8F0"/>
-                </a:solidFill>
-                <a:latin typeface="Calibri" pitchFamily="34" charset="0"/>
-                <a:ea typeface="Calibri" pitchFamily="34" charset="-122"/>
-                <a:cs typeface="Calibri" pitchFamily="34" charset="-120"/>
-              </a:rPr>
-              <a:t>Discuter les 3 notations : O, Omega, Theta avec exemples</a:t>
-            </a:r>
-            <a:endParaRPr lang="en-US" sz="1500" dirty="0"/>
-          </a:p>
-          <a:p>
-            <a:pPr marL="342900" indent="-342900">
-              <a:buSzPct val="100000"/>
-              <a:buChar char="•"/>
-            </a:pPr>
-            <a:r>
-              <a:rPr lang="en-US" sz="1200" dirty="0">
-                <a:solidFill>
-                  <a:srgbClr val="E2E8F0"/>
-                </a:solidFill>
-                <a:latin typeface="Calibri" pitchFamily="34" charset="0"/>
-                <a:ea typeface="Calibri" pitchFamily="34" charset="-122"/>
-                <a:cs typeface="Calibri" pitchFamily="34" charset="-120"/>
-              </a:rPr>
-              <a:t>Expliquer comment évaluer la complexité d'un algorithme</a:t>
-            </a:r>
-            <a:endParaRPr lang="en-US" sz="1500" dirty="0"/>
-          </a:p>
-          <a:p>
-            <a:pPr marL="342900" indent="-342900">
-              <a:buSzPct val="100000"/>
-              <a:buChar char="•"/>
-            </a:pPr>
-            <a:r>
-              <a:rPr lang="en-US" sz="1200" dirty="0">
-                <a:solidFill>
-                  <a:srgbClr val="E2E8F0"/>
-                </a:solidFill>
-                <a:latin typeface="Calibri" pitchFamily="34" charset="0"/>
-                <a:ea typeface="Calibri" pitchFamily="34" charset="-122"/>
-                <a:cs typeface="Calibri" pitchFamily="34" charset="-120"/>
-              </a:rPr>
-              <a:t>Donner des exemples concrets pour chaque classe de complexité</a:t>
-            </a:r>
-            <a:endParaRPr lang="en-US" sz="1500" dirty="0"/>
-          </a:p>
-          <a:p>
-            <a:pPr marL="342900" indent="-342900">
-              <a:buSzPct val="100000"/>
-              <a:buChar char="•"/>
-            </a:pPr>
-            <a:r>
-              <a:rPr lang="en-US" sz="1200" dirty="0">
-                <a:solidFill>
-                  <a:srgbClr val="E2E8F0"/>
-                </a:solidFill>
-                <a:latin typeface="Calibri" pitchFamily="34" charset="0"/>
-                <a:ea typeface="Calibri" pitchFamily="34" charset="-122"/>
-                <a:cs typeface="Calibri" pitchFamily="34" charset="-120"/>
-              </a:rPr>
-              <a:t>Montrer l'impact pratique : n=10 vs n=10000 vs n=1000000</a:t>
-            </a:r>
-            <a:endParaRPr lang="en-US" sz="1500" dirty="0"/>
+            <a:pPr algn="ctr" indent="0" marL="0">
+              <a:buNone/>
+            </a:pPr>
+            <a:r>
+              <a:rPr lang="en-US" sz="2800" dirty="0">
+                <a:solidFill>
+                  <a:srgbClr val="000000"/>
+                </a:solidFill>
+              </a:rPr>
+              <a:t>📊</a:t>
+            </a:r>
+            <a:endParaRPr lang="en-US" sz="2800" dirty="0"/>
+          </a:p>
+        </p:txBody>
+      </p:sp>
+      <p:sp>
+        <p:nvSpPr>
+          <p:cNvPr id="5" name="Text 3"/>
+          <p:cNvSpPr/>
+          <p:nvPr/>
+        </p:nvSpPr>
+        <p:spPr>
+          <a:xfrm>
+            <a:off x="685800" y="1828800"/>
+            <a:ext cx="2346960" cy="365760"/>
+          </a:xfrm>
+          <a:prstGeom prst="rect">
+            <a:avLst/>
+          </a:prstGeom>
+          <a:noFill/>
+          <a:ln/>
+        </p:spPr>
+        <p:txBody>
+          <a:bodyPr wrap="square" rtlCol="0" anchor="ctr"/>
+          <a:lstStyle/>
+          <a:p>
+            <a:pPr algn="ctr" indent="0" marL="0">
+              <a:buNone/>
+            </a:pPr>
+            <a:r>
+              <a:rPr lang="en-US" sz="1300" b="1" dirty="0">
+                <a:solidFill>
+                  <a:srgbClr val="D97706"/>
+                </a:solidFill>
+                <a:latin typeface="Calibri" pitchFamily="34" charset="0"/>
+                <a:ea typeface="Calibri" pitchFamily="34" charset="-122"/>
+                <a:cs typeface="Calibri" pitchFamily="34" charset="-120"/>
+              </a:rPr>
+              <a:t>Big O</a:t>
+            </a:r>
+            <a:endParaRPr lang="en-US" sz="1300" dirty="0"/>
+          </a:p>
+        </p:txBody>
+      </p:sp>
+      <p:sp>
+        <p:nvSpPr>
+          <p:cNvPr id="6" name="Text 4"/>
+          <p:cNvSpPr/>
+          <p:nvPr/>
+        </p:nvSpPr>
+        <p:spPr>
+          <a:xfrm>
+            <a:off x="685800" y="2286000"/>
+            <a:ext cx="2346960" cy="1828800"/>
+          </a:xfrm>
+          <a:prstGeom prst="rect">
+            <a:avLst/>
+          </a:prstGeom>
+          <a:noFill/>
+          <a:ln/>
+        </p:spPr>
+        <p:txBody>
+          <a:bodyPr wrap="square" rtlCol="0" anchor="t"/>
+          <a:lstStyle/>
+          <a:p>
+            <a:pPr algn="ctr" indent="0" marL="0">
+              <a:buNone/>
+            </a:pPr>
+            <a:r>
+              <a:rPr lang="en-US" sz="1100" dirty="0">
+                <a:solidFill>
+                  <a:srgbClr val="94A3B8"/>
+                </a:solidFill>
+                <a:latin typeface="Calibri" pitchFamily="34" charset="0"/>
+                <a:ea typeface="Calibri" pitchFamily="34" charset="-122"/>
+                <a:cs typeface="Calibri" pitchFamily="34" charset="-120"/>
+              </a:rPr>
+              <a:t>Borne supérieure — pire cas</a:t>
+            </a:r>
+            <a:endParaRPr lang="en-US" sz="1100" dirty="0"/>
+          </a:p>
+        </p:txBody>
+      </p:sp>
+      <p:sp>
+        <p:nvSpPr>
+          <p:cNvPr id="7" name="Shape 5"/>
+          <p:cNvSpPr/>
+          <p:nvPr/>
+        </p:nvSpPr>
+        <p:spPr>
+          <a:xfrm>
+            <a:off x="3352800" y="1097280"/>
+            <a:ext cx="2621280" cy="3200400"/>
+          </a:xfrm>
+          <a:prstGeom prst="roundRect">
+            <a:avLst>
+              <a:gd name="adj" fmla="val 3488"/>
+            </a:avLst>
+          </a:prstGeom>
+          <a:solidFill>
+            <a:srgbClr val="2D2400"/>
+          </a:solidFill>
+          <a:ln/>
+        </p:spPr>
+      </p:sp>
+      <p:sp>
+        <p:nvSpPr>
+          <p:cNvPr id="8" name="Text 6"/>
+          <p:cNvSpPr/>
+          <p:nvPr/>
+        </p:nvSpPr>
+        <p:spPr>
+          <a:xfrm>
+            <a:off x="3352800" y="1280160"/>
+            <a:ext cx="2621280" cy="457200"/>
+          </a:xfrm>
+          <a:prstGeom prst="rect">
+            <a:avLst/>
+          </a:prstGeom>
+          <a:noFill/>
+          <a:ln/>
+        </p:spPr>
+        <p:txBody>
+          <a:bodyPr wrap="square" rtlCol="0" anchor="ctr"/>
+          <a:lstStyle/>
+          <a:p>
+            <a:pPr algn="ctr" indent="0" marL="0">
+              <a:buNone/>
+            </a:pPr>
+            <a:r>
+              <a:rPr lang="en-US" sz="2800" dirty="0">
+                <a:solidFill>
+                  <a:srgbClr val="000000"/>
+                </a:solidFill>
+              </a:rPr>
+              <a:t>⏱️</a:t>
+            </a:r>
+            <a:endParaRPr lang="en-US" sz="2800" dirty="0"/>
+          </a:p>
+        </p:txBody>
+      </p:sp>
+      <p:sp>
+        <p:nvSpPr>
+          <p:cNvPr id="9" name="Text 7"/>
+          <p:cNvSpPr/>
+          <p:nvPr/>
+        </p:nvSpPr>
+        <p:spPr>
+          <a:xfrm>
+            <a:off x="3489960" y="1828800"/>
+            <a:ext cx="2346960" cy="365760"/>
+          </a:xfrm>
+          <a:prstGeom prst="rect">
+            <a:avLst/>
+          </a:prstGeom>
+          <a:noFill/>
+          <a:ln/>
+        </p:spPr>
+        <p:txBody>
+          <a:bodyPr wrap="square" rtlCol="0" anchor="ctr"/>
+          <a:lstStyle/>
+          <a:p>
+            <a:pPr algn="ctr" indent="0" marL="0">
+              <a:buNone/>
+            </a:pPr>
+            <a:r>
+              <a:rPr lang="en-US" sz="1300" b="1" dirty="0">
+                <a:solidFill>
+                  <a:srgbClr val="D97706"/>
+                </a:solidFill>
+                <a:latin typeface="Calibri" pitchFamily="34" charset="0"/>
+                <a:ea typeface="Calibri" pitchFamily="34" charset="-122"/>
+                <a:cs typeface="Calibri" pitchFamily="34" charset="-120"/>
+              </a:rPr>
+              <a:t>Complexités</a:t>
+            </a:r>
+            <a:endParaRPr lang="en-US" sz="1300" dirty="0"/>
+          </a:p>
+        </p:txBody>
+      </p:sp>
+      <p:sp>
+        <p:nvSpPr>
+          <p:cNvPr id="10" name="Text 8"/>
+          <p:cNvSpPr/>
+          <p:nvPr/>
+        </p:nvSpPr>
+        <p:spPr>
+          <a:xfrm>
+            <a:off x="3489960" y="2286000"/>
+            <a:ext cx="2346960" cy="1828800"/>
+          </a:xfrm>
+          <a:prstGeom prst="rect">
+            <a:avLst/>
+          </a:prstGeom>
+          <a:noFill/>
+          <a:ln/>
+        </p:spPr>
+        <p:txBody>
+          <a:bodyPr wrap="square" rtlCol="0" anchor="t"/>
+          <a:lstStyle/>
+          <a:p>
+            <a:pPr algn="ctr" indent="0" marL="0">
+              <a:buNone/>
+            </a:pPr>
+            <a:r>
+              <a:rPr lang="en-US" sz="1100" dirty="0">
+                <a:solidFill>
+                  <a:srgbClr val="94A3B8"/>
+                </a:solidFill>
+                <a:latin typeface="Calibri" pitchFamily="34" charset="0"/>
+                <a:ea typeface="Calibri" pitchFamily="34" charset="-122"/>
+                <a:cs typeface="Calibri" pitchFamily="34" charset="-120"/>
+              </a:rPr>
+              <a:t>O(1) &lt; O(log n) &lt; O(n) &lt; O(n log n) &lt; O(n²)</a:t>
+            </a:r>
+            <a:endParaRPr lang="en-US" sz="1100" dirty="0"/>
+          </a:p>
+        </p:txBody>
+      </p:sp>
+      <p:sp>
+        <p:nvSpPr>
+          <p:cNvPr id="11" name="Shape 9"/>
+          <p:cNvSpPr/>
+          <p:nvPr/>
+        </p:nvSpPr>
+        <p:spPr>
+          <a:xfrm>
+            <a:off x="6156960" y="1097280"/>
+            <a:ext cx="2621280" cy="3200400"/>
+          </a:xfrm>
+          <a:prstGeom prst="roundRect">
+            <a:avLst>
+              <a:gd name="adj" fmla="val 3488"/>
+            </a:avLst>
+          </a:prstGeom>
+          <a:solidFill>
+            <a:srgbClr val="2D2400"/>
+          </a:solidFill>
+          <a:ln/>
+        </p:spPr>
+      </p:sp>
+      <p:sp>
+        <p:nvSpPr>
+          <p:cNvPr id="12" name="Text 10"/>
+          <p:cNvSpPr/>
+          <p:nvPr/>
+        </p:nvSpPr>
+        <p:spPr>
+          <a:xfrm>
+            <a:off x="6156960" y="1280160"/>
+            <a:ext cx="2621280" cy="457200"/>
+          </a:xfrm>
+          <a:prstGeom prst="rect">
+            <a:avLst/>
+          </a:prstGeom>
+          <a:noFill/>
+          <a:ln/>
+        </p:spPr>
+        <p:txBody>
+          <a:bodyPr wrap="square" rtlCol="0" anchor="ctr"/>
+          <a:lstStyle/>
+          <a:p>
+            <a:pPr algn="ctr" indent="0" marL="0">
+              <a:buNone/>
+            </a:pPr>
+            <a:r>
+              <a:rPr lang="en-US" sz="2800" dirty="0">
+                <a:solidFill>
+                  <a:srgbClr val="000000"/>
+                </a:solidFill>
+              </a:rPr>
+              <a:t>🔢</a:t>
+            </a:r>
+            <a:endParaRPr lang="en-US" sz="2800" dirty="0"/>
+          </a:p>
+        </p:txBody>
+      </p:sp>
+      <p:sp>
+        <p:nvSpPr>
+          <p:cNvPr id="13" name="Text 11"/>
+          <p:cNvSpPr/>
+          <p:nvPr/>
+        </p:nvSpPr>
+        <p:spPr>
+          <a:xfrm>
+            <a:off x="6294120" y="1828800"/>
+            <a:ext cx="2346960" cy="365760"/>
+          </a:xfrm>
+          <a:prstGeom prst="rect">
+            <a:avLst/>
+          </a:prstGeom>
+          <a:noFill/>
+          <a:ln/>
+        </p:spPr>
+        <p:txBody>
+          <a:bodyPr wrap="square" rtlCol="0" anchor="ctr"/>
+          <a:lstStyle/>
+          <a:p>
+            <a:pPr algn="ctr" indent="0" marL="0">
+              <a:buNone/>
+            </a:pPr>
+            <a:r>
+              <a:rPr lang="en-US" sz="1300" b="1" dirty="0">
+                <a:solidFill>
+                  <a:srgbClr val="D97706"/>
+                </a:solidFill>
+                <a:latin typeface="Calibri" pitchFamily="34" charset="0"/>
+                <a:ea typeface="Calibri" pitchFamily="34" charset="-122"/>
+                <a:cs typeface="Calibri" pitchFamily="34" charset="-120"/>
+              </a:rPr>
+              <a:t>Calcul</a:t>
+            </a:r>
+            <a:endParaRPr lang="en-US" sz="1300" dirty="0"/>
+          </a:p>
+        </p:txBody>
+      </p:sp>
+      <p:sp>
+        <p:nvSpPr>
+          <p:cNvPr id="14" name="Text 12"/>
+          <p:cNvSpPr/>
+          <p:nvPr/>
+        </p:nvSpPr>
+        <p:spPr>
+          <a:xfrm>
+            <a:off x="6294120" y="2286000"/>
+            <a:ext cx="2346960" cy="1828800"/>
+          </a:xfrm>
+          <a:prstGeom prst="rect">
+            <a:avLst/>
+          </a:prstGeom>
+          <a:noFill/>
+          <a:ln/>
+        </p:spPr>
+        <p:txBody>
+          <a:bodyPr wrap="square" rtlCol="0" anchor="t"/>
+          <a:lstStyle/>
+          <a:p>
+            <a:pPr algn="ctr" indent="0" marL="0">
+              <a:buNone/>
+            </a:pPr>
+            <a:r>
+              <a:rPr lang="en-US" sz="1100" dirty="0">
+                <a:solidFill>
+                  <a:srgbClr val="94A3B8"/>
+                </a:solidFill>
+                <a:latin typeface="Calibri" pitchFamily="34" charset="0"/>
+                <a:ea typeface="Calibri" pitchFamily="34" charset="-122"/>
+                <a:cs typeface="Calibri" pitchFamily="34" charset="-120"/>
+              </a:rPr>
+              <a:t>Terme dominant, ignorer constantes</a:t>
+            </a:r>
+            <a:endParaRPr lang="en-US" sz="1100" dirty="0"/>
           </a:p>
         </p:txBody>
       </p:sp>
